--- a/decks/englang-p2/englang-p2_ch6_q5-craft.pptx
+++ b/decks/englang-p2/englang-p2_ch6_q5-craft.pptx
@@ -131,31 +131,31 @@
   <p:extLst>
     <p:ext uri="{521415D9-36F7-43E2-AB2F-B90AF26B5E84}">
       <p14:sectionLst xmlns:p14="http://schemas.microsoft.com/office/powerpoint/2010/main">
-        <p14:section name="Opening" id="{acb4c02a-1eb5-900a-8f86-b7a8f88eb07f}">
+        <p14:section name="Opening" id="{c18177b8-cab9-2d4b-324a-1436b96556ca}">
           <p14:sldIdLst>
             <p14:sldId id="256"/>
             <p14:sldId id="257"/>
           </p14:sldIdLst>
         </p14:section>
-        <p14:section name="Gate" id="{fb75ce2b-6821-143a-0929-11999fb10199}">
+        <p14:section name="Gate" id="{eaa89a81-48f0-05b5-4f18-9dd6f62a307b}">
           <p14:sldIdLst>
             <p14:sldId id="258"/>
             <p14:sldId id="259"/>
           </p14:sldIdLst>
         </p14:section>
-        <p14:section name="Pre-teach" id="{7d0da5b0-1832-8b36-f3e3-3862465cc4c3}">
+        <p14:section name="Pre-teach" id="{7dfce685-a4db-40b7-31bb-2bc360960814}">
           <p14:sldIdLst>
             <p14:sldId id="260"/>
             <p14:sldId id="261"/>
           </p14:sldIdLst>
         </p14:section>
-        <p14:section name="Read-along" id="{f248f172-edeb-1593-8556-ff3e07476385}">
+        <p14:section name="Read-along" id="{93ace4ae-ff89-1a91-bc01-ff9383388595}">
           <p14:sldIdLst>
             <p14:sldId id="262"/>
             <p14:sldId id="263"/>
           </p14:sldIdLst>
         </p14:section>
-        <p14:section name="Teach" id="{27a49d01-0f77-72e5-eec7-4230ea14ba17}">
+        <p14:section name="Teach" id="{519ea1ea-b968-aa0f-337c-933954503bf2}">
           <p14:sldIdLst>
             <p14:sldId id="264"/>
             <p14:sldId id="265"/>
@@ -166,7 +166,7 @@
             <p14:sldId id="270"/>
           </p14:sldIdLst>
         </p14:section>
-        <p14:section name="Routes" id="{e9ab28d7-c88b-eaa6-eae3-6124957a4796}">
+        <p14:section name="Routes" id="{bae38ac0-9941-96eb-91c4-24cda7d4113e}">
           <p14:sldIdLst>
             <p14:sldId id="271"/>
             <p14:sldId id="272"/>
@@ -176,12 +176,12 @@
             <p14:sldId id="276"/>
           </p14:sldIdLst>
         </p14:section>
-        <p14:section name="Close" id="{e54cd1ab-23da-c7ae-b77b-8b191858ef03}">
+        <p14:section name="Close" id="{e2dc8532-edf8-e5e8-9689-5c20f8cfd4f0}">
           <p14:sldIdLst>
             <p14:sldId id="277"/>
           </p14:sldIdLst>
         </p14:section>
-        <p14:section name="Answers" id="{d6fe9448-563c-258f-dff9-76b67c687075}">
+        <p14:section name="Answers" id="{745becf8-133c-4e05-2a16-22cd439df160}">
           <p14:sldIdLst>
             <p14:sldId id="278"/>
             <p14:sldId id="279"/>
@@ -1895,7 +1895,7 @@
               <a:rPr lang="en-US" dirty="0"/>
               <a:t>Exit ticket — individual, silent, on a slip or mini-whiteboard. Recall before help: no notes, no lanes, no hints. Collect before pupils leave.
 Question: Which of these is a rhetorical question used as a hook?
-Answer: D   Have you ever paid to watch an animal be bored?. A rhetorical question is asked for effect, not for an answer, and it makes the reader think before you have made your point.
+Answer: C   Have you ever paid to watch an animal be bored?. A rhetorical question is asked for effect, not for an answer, and it makes the reader think before you have made your point.
 Source of this question: gate item 1 re-asked (options rotated) — this chapter has no third quick-check module.
 The ebook also holds task 3, "Question 5 practice: argue your view", for homework or the next lesson's do now.
 Sort the slips: correct → ready to move on; incorrect → start next lesson in the pre-teach group, with the read-along and the Support lane. Same destination next time.</a:t>
@@ -2169,7 +2169,7 @@
             <a:r>
               <a:rPr lang="en-US" dirty="0"/>
               <a:t>Answers — exit ticket: Exit ticket. Reveal the answer; pupils mark their own work in a different colour, then read the "why" together. Same destination for every lane, so one answer serves the whole class.
-Answer: D   Have you ever paid to watch an animal be bored?
+Answer: C   Have you ever paid to watch an animal be bored?
 Why: A rhetorical question is asked for effect, not for an answer, and it makes the reader think before you have made your point.
 Ask a Support pupil to explain one step, and a Stretch pupil to share their extension.</a:t>
             </a:r>
@@ -2260,9 +2260,9 @@
             <a:r>
               <a:rPr lang="en-US" dirty="0"/>
               <a:t>Do now — retrieval. Silent, no notes, no help: recall comes before any support. Give about four minutes.
-1. Which of these is a rhetorical question used as a hook?  →  A   Have you ever paid to watch an animal be bored?
+1. Which of these is a rhetorical question used as a hook?  →  D   Have you ever paid to watch an animal be bored?
 2. In an argument, the paragraph that gives the other side’s view and then answers it is the ___-argument.  →  counter
-3. Which sentence uses a semicolon correctly?  →  A   The tiger paced; the crowd kept filming.
+3. Which sentence uses a semicolon correctly?  →  B   The tiger paced; the crowd kept filming.
 Circulate: who gets 3/3 (Stretch route), 2/3 (Core), 0–1 (Support)? Use this to route pupils later in the lesson.</a:t>
             </a:r>
             <a:endParaRPr lang="en-US" dirty="0"/>
@@ -2352,9 +2352,9 @@
             <a:r>
               <a:rPr lang="en-US" dirty="0"/>
               <a:t>Answers — pupils mark their own in a different colour, then hands up for 3/3, 2/3, 1/3.
-1. A   Have you ever paid to watch an animal be bored?. A rhetorical question is asked for effect, not for an answer, and it makes the reader think before you have made your point.
+1. D   Have you ever paid to watch an animal be bored?. A rhetorical question is asked for effect, not for an answer, and it makes the reader think before you have made your point.
 2. counter. The counter-argument states what someone would argue against you and then refutes it.
-3. A   The tiger paced; the crowd kept filming.. A semicolon links two complete sentences that are closely related: ‘The tiger paced; the crowd kept filming.’
+3. B   The tiger paced; the crowd kept filming.. A semicolon links two complete sentences that are closely related: ‘The tiger paced; the crowd kept filming.’
 Say the route each score points to: 3/3 Stretch, 2/3 Core, 0–1 Support. Pupils may choose to move up.</a:t>
             </a:r>
             <a:endParaRPr lang="en-US" dirty="0"/>
@@ -13395,7 +13395,7 @@
                 <a:ea typeface="Calibri" pitchFamily="34" charset="-122"/>
                 <a:cs typeface="Calibri" pitchFamily="34" charset="-120"/>
               </a:rPr>
-              <a:t>Zoos were first opened to the public in the nineteenth century.</a:t>
+              <a:t>Please visit the zoo this weekend.</a:t>
             </a:r>
             <a:endParaRPr lang="en-US" sz="2400" dirty="0"/>
           </a:p>
@@ -13469,7 +13469,7 @@
                 <a:ea typeface="Calibri" pitchFamily="34" charset="-122"/>
                 <a:cs typeface="Calibri" pitchFamily="34" charset="-120"/>
               </a:rPr>
-              <a:t>Please visit the zoo this weekend.</a:t>
+              <a:t>Have you ever paid to watch an animal be bored?</a:t>
             </a:r>
             <a:endParaRPr lang="en-US" sz="2400" dirty="0"/>
           </a:p>
@@ -13506,7 +13506,7 @@
                 <a:ea typeface="Calibri" pitchFamily="34" charset="-122"/>
                 <a:cs typeface="Calibri" pitchFamily="34" charset="-120"/>
               </a:rPr>
-              <a:t>Have you ever paid to watch an animal be bored?</a:t>
+              <a:t>Zoos were first opened to the public in the nineteenth century.</a:t>
             </a:r>
             <a:endParaRPr lang="en-US" sz="2400" dirty="0"/>
           </a:p>
@@ -15162,7 +15162,7 @@
                 <a:ea typeface="Cambria" pitchFamily="34" charset="-122"/>
                 <a:cs typeface="Cambria" pitchFamily="34" charset="-120"/>
               </a:rPr>
-              <a:t>D   Have you ever paid to watch an animal be bored?</a:t>
+              <a:t>C   Have you ever paid to watch an animal be bored?</a:t>
             </a:r>
             <a:endParaRPr lang="en-US" sz="1800" dirty="0"/>
           </a:p>
@@ -15696,7 +15696,7 @@
                 <a:ea typeface="Calibri" pitchFamily="34" charset="-122"/>
                 <a:cs typeface="Calibri" pitchFamily="34" charset="-120"/>
               </a:rPr>
-              <a:t>Have you ever paid to watch an animal be bored?</a:t>
+              <a:t>Zoos were first opened to the public in the nineteenth century.</a:t>
             </a:r>
             <a:endParaRPr lang="en-US" sz="1800" dirty="0"/>
           </a:p>
@@ -15733,7 +15733,7 @@
                 <a:ea typeface="Calibri" pitchFamily="34" charset="-122"/>
                 <a:cs typeface="Calibri" pitchFamily="34" charset="-120"/>
               </a:rPr>
-              <a:t>Zoos were first opened to the public in the nineteenth century.</a:t>
+              <a:t>Please visit the zoo this weekend.</a:t>
             </a:r>
             <a:endParaRPr lang="en-US" sz="1800" dirty="0"/>
           </a:p>
@@ -15807,7 +15807,7 @@
                 <a:ea typeface="Calibri" pitchFamily="34" charset="-122"/>
                 <a:cs typeface="Calibri" pitchFamily="34" charset="-120"/>
               </a:rPr>
-              <a:t>Please visit the zoo this weekend.</a:t>
+              <a:t>Have you ever paid to watch an animal be bored?</a:t>
             </a:r>
             <a:endParaRPr lang="en-US" sz="1800" dirty="0"/>
           </a:p>
@@ -16209,7 +16209,7 @@
                 <a:ea typeface="Calibri" pitchFamily="34" charset="-122"/>
                 <a:cs typeface="Calibri" pitchFamily="34" charset="-120"/>
               </a:rPr>
-              <a:t>The tiger paced; the crowd kept filming.</a:t>
+              <a:t>The tiger; paced along the fence.</a:t>
             </a:r>
             <a:endParaRPr lang="en-US" sz="1800" dirty="0"/>
           </a:p>
@@ -16246,7 +16246,7 @@
                 <a:ea typeface="Calibri" pitchFamily="34" charset="-122"/>
                 <a:cs typeface="Calibri" pitchFamily="34" charset="-120"/>
               </a:rPr>
-              <a:t>The tiger; paced along the fence.</a:t>
+              <a:t>The tiger paced; the crowd kept filming.</a:t>
             </a:r>
             <a:endParaRPr lang="en-US" sz="1800" dirty="0"/>
           </a:p>
@@ -16283,7 +16283,7 @@
                 <a:ea typeface="Calibri" pitchFamily="34" charset="-122"/>
                 <a:cs typeface="Calibri" pitchFamily="34" charset="-120"/>
               </a:rPr>
-              <a:t>The tiger paced along; the fence.</a:t>
+              <a:t>The tiger paced, the crowd kept filming;</a:t>
             </a:r>
             <a:endParaRPr lang="en-US" sz="1800" dirty="0"/>
           </a:p>
@@ -16320,7 +16320,7 @@
                 <a:ea typeface="Calibri" pitchFamily="34" charset="-122"/>
                 <a:cs typeface="Calibri" pitchFamily="34" charset="-120"/>
               </a:rPr>
-              <a:t>The tiger paced, the crowd kept filming;</a:t>
+              <a:t>The tiger paced along; the fence.</a:t>
             </a:r>
             <a:endParaRPr lang="en-US" sz="1800" dirty="0"/>
           </a:p>
@@ -16721,7 +16721,7 @@
                 <a:ea typeface="Calibri" pitchFamily="34" charset="-122"/>
                 <a:cs typeface="Calibri" pitchFamily="34" charset="-120"/>
               </a:rPr>
-              <a:t>A   Have you ever paid to watch an animal be bored?</a:t>
+              <a:t>D   Have you ever paid to watch an animal be bored?</a:t>
             </a:r>
             <a:endParaRPr lang="en-US" sz="2200" dirty="0"/>
           </a:p>
@@ -17201,7 +17201,7 @@
                 <a:ea typeface="Calibri" pitchFamily="34" charset="-122"/>
                 <a:cs typeface="Calibri" pitchFamily="34" charset="-120"/>
               </a:rPr>
-              <a:t>A   The tiger paced; the crowd kept filming.</a:t>
+              <a:t>B   The tiger paced; the crowd kept filming.</a:t>
             </a:r>
             <a:endParaRPr lang="en-US" sz="2200" dirty="0"/>
           </a:p>

--- a/decks/englang-p2/englang-p2_ch6_q5-craft.pptx
+++ b/decks/englang-p2/englang-p2_ch6_q5-craft.pptx
@@ -131,31 +131,31 @@
   <p:extLst>
     <p:ext uri="{521415D9-36F7-43E2-AB2F-B90AF26B5E84}">
       <p14:sectionLst xmlns:p14="http://schemas.microsoft.com/office/powerpoint/2010/main">
-        <p14:section name="Opening" id="{c18177b8-cab9-2d4b-324a-1436b96556ca}">
+        <p14:section name="Opening" id="{fa436291-3af9-5ee4-6449-13b64c4603dd}">
           <p14:sldIdLst>
             <p14:sldId id="256"/>
             <p14:sldId id="257"/>
           </p14:sldIdLst>
         </p14:section>
-        <p14:section name="Gate" id="{eaa89a81-48f0-05b5-4f18-9dd6f62a307b}">
+        <p14:section name="Gate" id="{714ee612-b199-34a8-191f-492e95718f09}">
           <p14:sldIdLst>
             <p14:sldId id="258"/>
             <p14:sldId id="259"/>
           </p14:sldIdLst>
         </p14:section>
-        <p14:section name="Pre-teach" id="{7dfce685-a4db-40b7-31bb-2bc360960814}">
+        <p14:section name="Pre-teach" id="{e35d714c-3ac1-37ef-0cb8-e8d13a37ea18}">
           <p14:sldIdLst>
             <p14:sldId id="260"/>
             <p14:sldId id="261"/>
           </p14:sldIdLst>
         </p14:section>
-        <p14:section name="Read-along" id="{93ace4ae-ff89-1a91-bc01-ff9383388595}">
+        <p14:section name="Read-along" id="{2d9dae1a-b695-ea4d-57f1-2a7249fdec8d}">
           <p14:sldIdLst>
             <p14:sldId id="262"/>
             <p14:sldId id="263"/>
           </p14:sldIdLst>
         </p14:section>
-        <p14:section name="Teach" id="{519ea1ea-b968-aa0f-337c-933954503bf2}">
+        <p14:section name="Teach" id="{d64bbe09-bfe0-361a-60ed-504453ecdf0d}">
           <p14:sldIdLst>
             <p14:sldId id="264"/>
             <p14:sldId id="265"/>
@@ -166,7 +166,7 @@
             <p14:sldId id="270"/>
           </p14:sldIdLst>
         </p14:section>
-        <p14:section name="Routes" id="{bae38ac0-9941-96eb-91c4-24cda7d4113e}">
+        <p14:section name="Routes" id="{a01a14aa-3e56-6c69-84c1-5d341b92bbe9}">
           <p14:sldIdLst>
             <p14:sldId id="271"/>
             <p14:sldId id="272"/>
@@ -176,12 +176,12 @@
             <p14:sldId id="276"/>
           </p14:sldIdLst>
         </p14:section>
-        <p14:section name="Close" id="{e2dc8532-edf8-e5e8-9689-5c20f8cfd4f0}">
+        <p14:section name="Close" id="{1b3410d7-f3c6-5ac3-7da7-dbf6ad2f16ec}">
           <p14:sldIdLst>
             <p14:sldId id="277"/>
           </p14:sldIdLst>
         </p14:section>
-        <p14:section name="Answers" id="{745becf8-133c-4e05-2a16-22cd439df160}">
+        <p14:section name="Answers" id="{74c76495-6242-fd8e-8afa-08f6b7ee27cc}">
           <p14:sldIdLst>
             <p14:sldId id="278"/>
             <p14:sldId id="279"/>
